--- a/examples/supply-chain.pptx
+++ b/examples/supply-chain.pptx
@@ -7,7 +7,7 @@
   <p:sldIdLst>
     <p:sldId id="256" r:id="rId7"/>
   </p:sldIdLst>
-  <p:sldSz cx="8002781" cy="2082641" type="screen4x3"/>
+  <p:sldSz cx="8238525" cy="2082641" type="screen4x3"/>
   <p:notesSz cx="6858000" cy="9144000"/>
   <p:defaultTextStyle>
     <a:defPPr>
@@ -3096,8 +3096,8 @@
         </p:nvSpPr>
         <p:spPr>
           <a:xfrm>
-            <a:off x="1316424" y="137160"/>
-            <a:ext cx="3762732" cy="1808321"/>
+            <a:off x="1286758" y="137160"/>
+            <a:ext cx="3998475" cy="1808321"/>
           </a:xfrm>
           <a:prstGeom prst="rect">
             <a:avLst/>
@@ -3394,7 +3394,7 @@
         <p:spPr>
           <a:xfrm>
             <a:off x="2863423" y="467439"/>
-            <a:ext cx="728067" cy="233362"/>
+            <a:ext cx="845145" cy="233362"/>
           </a:xfrm>
           <a:prstGeom prst="rect">
             <a:avLst/>
@@ -3421,7 +3421,7 @@
           </a:fontRef>
         </p:style>
         <p:txBody>
-          <a:bodyPr rtlCol="0" anchor="ctr" wrap="none" lIns="0" rIns="0" tIns="0" bIns="0"/>
+          <a:bodyPr rtlCol="0" anchor="ctr" wrap="square" lIns="0" rIns="0" tIns="0" bIns="0"/>
           <a:lstStyle/>
           <a:p>
             <a:pPr algn="ctr"/>
@@ -3446,7 +3446,7 @@
         </p:nvCxnSpPr>
         <p:spPr>
           <a:xfrm>
-            <a:off x="3591490" y="584120"/>
+            <a:off x="3708568" y="584120"/>
             <a:ext cx="457200" cy="0"/>
           </a:xfrm>
           <a:prstGeom prst="line">
@@ -3483,8 +3483,8 @@
         </p:nvSpPr>
         <p:spPr>
           <a:xfrm>
-            <a:off x="4048690" y="467439"/>
-            <a:ext cx="726479" cy="233362"/>
+            <a:off x="4165768" y="467439"/>
+            <a:ext cx="845145" cy="233362"/>
           </a:xfrm>
           <a:prstGeom prst="rect">
             <a:avLst/>
@@ -3511,7 +3511,7 @@
           </a:fontRef>
         </p:style>
         <p:txBody>
-          <a:bodyPr rtlCol="0" anchor="ctr" wrap="none" lIns="0" rIns="0" tIns="0" bIns="0"/>
+          <a:bodyPr rtlCol="0" anchor="ctr" wrap="square" lIns="0" rIns="0" tIns="0" bIns="0"/>
           <a:lstStyle/>
           <a:p>
             <a:pPr algn="ctr"/>
@@ -3536,7 +3536,7 @@
         </p:nvCxnSpPr>
         <p:spPr>
           <a:xfrm>
-            <a:off x="4775170" y="584120"/>
+            <a:off x="5010914" y="584120"/>
             <a:ext cx="595312" cy="0"/>
           </a:xfrm>
           <a:prstGeom prst="line">
@@ -3573,7 +3573,7 @@
         </p:nvSpPr>
         <p:spPr>
           <a:xfrm>
-            <a:off x="4699446" y="400764"/>
+            <a:off x="4935190" y="400764"/>
             <a:ext cx="746759" cy="153352"/>
           </a:xfrm>
           <a:prstGeom prst="rect">
@@ -3609,7 +3609,7 @@
         </p:nvSpPr>
         <p:spPr>
           <a:xfrm>
-            <a:off x="4935666" y="614124"/>
+            <a:off x="5171410" y="614124"/>
             <a:ext cx="274320" cy="153352"/>
           </a:xfrm>
           <a:prstGeom prst="rect">
@@ -3645,7 +3645,7 @@
         </p:nvSpPr>
         <p:spPr>
           <a:xfrm>
-            <a:off x="5370482" y="419108"/>
+            <a:off x="5606226" y="419108"/>
             <a:ext cx="997369" cy="330024"/>
           </a:xfrm>
           <a:prstGeom prst="ellipse">
@@ -3698,7 +3698,7 @@
         </p:nvCxnSpPr>
         <p:spPr>
           <a:xfrm>
-            <a:off x="6367852" y="584120"/>
+            <a:off x="6603596" y="584120"/>
             <a:ext cx="541933" cy="0"/>
           </a:xfrm>
           <a:prstGeom prst="line">
@@ -3735,7 +3735,7 @@
         </p:nvSpPr>
         <p:spPr>
           <a:xfrm>
-            <a:off x="6265438" y="400764"/>
+            <a:off x="6501182" y="400764"/>
             <a:ext cx="746759" cy="153352"/>
           </a:xfrm>
           <a:prstGeom prst="rect">
@@ -3771,7 +3771,7 @@
         </p:nvSpPr>
         <p:spPr>
           <a:xfrm>
-            <a:off x="6501658" y="614124"/>
+            <a:off x="6737402" y="614124"/>
             <a:ext cx="274320" cy="153352"/>
           </a:xfrm>
           <a:prstGeom prst="rect">
@@ -3807,7 +3807,7 @@
         </p:nvSpPr>
         <p:spPr>
           <a:xfrm>
-            <a:off x="6909785" y="419108"/>
+            <a:off x="7145529" y="419108"/>
             <a:ext cx="955836" cy="330024"/>
           </a:xfrm>
           <a:prstGeom prst="ellipse">
@@ -3860,8 +3860,8 @@
         </p:nvSpPr>
         <p:spPr>
           <a:xfrm>
-            <a:off x="1590744" y="1269920"/>
-            <a:ext cx="3214092" cy="457200"/>
+            <a:off x="1561078" y="1269920"/>
+            <a:ext cx="3449835" cy="457200"/>
           </a:xfrm>
           <a:prstGeom prst="rect">
             <a:avLst/>
@@ -3912,9 +3912,9 @@
           <p:nvPr/>
         </p:nvCxnSpPr>
         <p:spPr>
-          <a:xfrm flipH="1" flipV="1">
+          <a:xfrm flipV="1">
             <a:off x="1983650" y="700801"/>
-            <a:ext cx="1214140" cy="569119"/>
+            <a:ext cx="0" cy="569119"/>
           </a:xfrm>
           <a:prstGeom prst="line">
             <a:avLst/>
@@ -3950,8 +3950,8 @@
         </p:nvCxnSpPr>
         <p:spPr>
           <a:xfrm flipV="1">
-            <a:off x="3197790" y="700801"/>
-            <a:ext cx="29667" cy="569119"/>
+            <a:off x="3285996" y="700801"/>
+            <a:ext cx="0" cy="569119"/>
           </a:xfrm>
           <a:prstGeom prst="line">
             <a:avLst/>
@@ -3987,8 +3987,8 @@
         </p:nvCxnSpPr>
         <p:spPr>
           <a:xfrm flipV="1">
-            <a:off x="3197790" y="700801"/>
-            <a:ext cx="850900" cy="569119"/>
+            <a:off x="4588341" y="700801"/>
+            <a:ext cx="0" cy="569119"/>
           </a:xfrm>
           <a:prstGeom prst="line">
             <a:avLst/>
@@ -4024,7 +4024,7 @@
         </p:nvSpPr>
         <p:spPr>
           <a:xfrm>
-            <a:off x="2880786" y="175926"/>
+            <a:off x="2968992" y="175926"/>
             <a:ext cx="634007" cy="233362"/>
           </a:xfrm>
           <a:prstGeom prst="rect">

--- a/examples/supply-chain.pptx
+++ b/examples/supply-chain.pptx
@@ -7,7 +7,7 @@
   <p:sldIdLst>
     <p:sldId id="256" r:id="rId7"/>
   </p:sldIdLst>
-  <p:sldSz cx="8238525" cy="2082641" type="screen4x3"/>
+  <p:sldSz cx="8835505" cy="2082641" type="screen4x3"/>
   <p:notesSz cx="6858000" cy="9144000"/>
   <p:defaultTextStyle>
     <a:defPPr>
@@ -3096,8 +3096,8 @@
         </p:nvSpPr>
         <p:spPr>
           <a:xfrm>
-            <a:off x="1286758" y="137160"/>
-            <a:ext cx="3998475" cy="1808321"/>
+            <a:off x="1436935" y="137160"/>
+            <a:ext cx="4134043" cy="1808321"/>
           </a:xfrm>
           <a:prstGeom prst="rect">
             <a:avLst/>
@@ -3110,6 +3110,7 @@
               <a:srgbClr val="000000"/>
             </a:solidFill>
           </a:ln>
+          <a:effectLst/>
         </p:spPr>
         <p:style>
           <a:lnRef idx="1">
@@ -3142,7 +3143,7 @@
         <p:spPr>
           <a:xfrm>
             <a:off x="137160" y="419108"/>
-            <a:ext cx="802610" cy="330024"/>
+            <a:ext cx="888722" cy="330024"/>
           </a:xfrm>
           <a:prstGeom prst="ellipse">
             <a:avLst/>
@@ -3153,6 +3154,7 @@
               <a:srgbClr val="000000"/>
             </a:solidFill>
           </a:ln>
+          <a:effectLst/>
         </p:spPr>
         <p:style>
           <a:lnRef idx="1">
@@ -3169,7 +3171,7 @@
           </a:fontRef>
         </p:style>
         <p:txBody>
-          <a:bodyPr rtlCol="0" anchor="ctr" wrap="none" lIns="0" rIns="0" tIns="0" bIns="0"/>
+          <a:bodyPr rtlCol="0" anchor="ctr" wrap="none" tIns="0" bIns="0"/>
           <a:lstStyle/>
           <a:p>
             <a:pPr algn="ctr"/>
@@ -3194,8 +3196,8 @@
         </p:nvCxnSpPr>
         <p:spPr>
           <a:xfrm>
-            <a:off x="939770" y="584120"/>
-            <a:ext cx="621308" cy="0"/>
+            <a:off x="1025882" y="584120"/>
+            <a:ext cx="685373" cy="0"/>
           </a:xfrm>
           <a:prstGeom prst="line">
             <a:avLst/>
@@ -3207,6 +3209,7 @@
             <a:headEnd type="none"/>
             <a:tailEnd type="triangle"/>
           </a:ln>
+          <a:effectLst/>
         </p:spPr>
         <p:style>
           <a:lnRef idx="2">
@@ -3231,8 +3234,8 @@
         </p:nvSpPr>
         <p:spPr>
           <a:xfrm>
-            <a:off x="830371" y="400764"/>
-            <a:ext cx="840105" cy="153352"/>
+            <a:off x="1117322" y="400764"/>
+            <a:ext cx="502493" cy="153352"/>
           </a:xfrm>
           <a:prstGeom prst="rect">
             <a:avLst/>
@@ -3267,8 +3270,8 @@
         </p:nvSpPr>
         <p:spPr>
           <a:xfrm>
-            <a:off x="1113264" y="614124"/>
-            <a:ext cx="274320" cy="153352"/>
+            <a:off x="1117322" y="614124"/>
+            <a:ext cx="502493" cy="153352"/>
           </a:xfrm>
           <a:prstGeom prst="rect">
             <a:avLst/>
@@ -3303,8 +3306,8 @@
         </p:nvSpPr>
         <p:spPr>
           <a:xfrm>
-            <a:off x="1561078" y="467439"/>
-            <a:ext cx="845145" cy="233362"/>
+            <a:off x="1711255" y="467439"/>
+            <a:ext cx="890334" cy="233362"/>
           </a:xfrm>
           <a:prstGeom prst="rect">
             <a:avLst/>
@@ -3315,6 +3318,7 @@
               <a:srgbClr val="000000"/>
             </a:solidFill>
           </a:ln>
+          <a:effectLst/>
         </p:spPr>
         <p:style>
           <a:lnRef idx="1">
@@ -3331,7 +3335,7 @@
           </a:fontRef>
         </p:style>
         <p:txBody>
-          <a:bodyPr rtlCol="0" anchor="ctr" wrap="none" lIns="0" rIns="0" tIns="0" bIns="0"/>
+          <a:bodyPr rtlCol="0" anchor="ctr" wrap="none" tIns="0" bIns="0"/>
           <a:lstStyle/>
           <a:p>
             <a:pPr algn="ctr"/>
@@ -3356,7 +3360,7 @@
         </p:nvCxnSpPr>
         <p:spPr>
           <a:xfrm>
-            <a:off x="2406223" y="584120"/>
+            <a:off x="2601590" y="584120"/>
             <a:ext cx="457200" cy="0"/>
           </a:xfrm>
           <a:prstGeom prst="line">
@@ -3369,6 +3373,7 @@
             <a:headEnd type="none"/>
             <a:tailEnd type="triangle"/>
           </a:ln>
+          <a:effectLst/>
         </p:spPr>
         <p:style>
           <a:lnRef idx="2">
@@ -3393,8 +3398,8 @@
         </p:nvSpPr>
         <p:spPr>
           <a:xfrm>
-            <a:off x="2863423" y="467439"/>
-            <a:ext cx="845145" cy="233362"/>
+            <a:off x="3058790" y="467439"/>
+            <a:ext cx="890334" cy="233362"/>
           </a:xfrm>
           <a:prstGeom prst="rect">
             <a:avLst/>
@@ -3405,6 +3410,7 @@
               <a:srgbClr val="000000"/>
             </a:solidFill>
           </a:ln>
+          <a:effectLst/>
         </p:spPr>
         <p:style>
           <a:lnRef idx="1">
@@ -3421,7 +3427,7 @@
           </a:fontRef>
         </p:style>
         <p:txBody>
-          <a:bodyPr rtlCol="0" anchor="ctr" wrap="square" lIns="0" rIns="0" tIns="0" bIns="0"/>
+          <a:bodyPr rtlCol="0" anchor="ctr" wrap="square" tIns="0" bIns="0"/>
           <a:lstStyle/>
           <a:p>
             <a:pPr algn="ctr"/>
@@ -3446,7 +3452,7 @@
         </p:nvCxnSpPr>
         <p:spPr>
           <a:xfrm>
-            <a:off x="3708568" y="584120"/>
+            <a:off x="3949124" y="584120"/>
             <a:ext cx="457200" cy="0"/>
           </a:xfrm>
           <a:prstGeom prst="line">
@@ -3459,6 +3465,7 @@
             <a:headEnd type="none"/>
             <a:tailEnd type="triangle"/>
           </a:ln>
+          <a:effectLst/>
         </p:spPr>
         <p:style>
           <a:lnRef idx="2">
@@ -3483,8 +3490,8 @@
         </p:nvSpPr>
         <p:spPr>
           <a:xfrm>
-            <a:off x="4165768" y="467439"/>
-            <a:ext cx="845145" cy="233362"/>
+            <a:off x="4406324" y="467439"/>
+            <a:ext cx="890334" cy="233362"/>
           </a:xfrm>
           <a:prstGeom prst="rect">
             <a:avLst/>
@@ -3495,6 +3502,7 @@
               <a:srgbClr val="000000"/>
             </a:solidFill>
           </a:ln>
+          <a:effectLst/>
         </p:spPr>
         <p:style>
           <a:lnRef idx="1">
@@ -3511,7 +3519,7 @@
           </a:fontRef>
         </p:style>
         <p:txBody>
-          <a:bodyPr rtlCol="0" anchor="ctr" wrap="square" lIns="0" rIns="0" tIns="0" bIns="0"/>
+          <a:bodyPr rtlCol="0" anchor="ctr" wrap="square" tIns="0" bIns="0"/>
           <a:lstStyle/>
           <a:p>
             <a:pPr algn="ctr"/>
@@ -3536,8 +3544,8 @@
         </p:nvCxnSpPr>
         <p:spPr>
           <a:xfrm>
-            <a:off x="5010914" y="584120"/>
-            <a:ext cx="595312" cy="0"/>
+            <a:off x="5296659" y="584120"/>
+            <a:ext cx="660966" cy="0"/>
           </a:xfrm>
           <a:prstGeom prst="line">
             <a:avLst/>
@@ -3549,6 +3557,7 @@
             <a:headEnd type="none"/>
             <a:tailEnd type="triangle"/>
           </a:ln>
+          <a:effectLst/>
         </p:spPr>
         <p:style>
           <a:lnRef idx="2">
@@ -3573,8 +3582,8 @@
         </p:nvSpPr>
         <p:spPr>
           <a:xfrm>
-            <a:off x="4935190" y="400764"/>
-            <a:ext cx="746759" cy="153352"/>
+            <a:off x="5388099" y="400764"/>
+            <a:ext cx="478085" cy="153352"/>
           </a:xfrm>
           <a:prstGeom prst="rect">
             <a:avLst/>
@@ -3609,8 +3618,8 @@
         </p:nvSpPr>
         <p:spPr>
           <a:xfrm>
-            <a:off x="5171410" y="614124"/>
-            <a:ext cx="274320" cy="153352"/>
+            <a:off x="5388099" y="614124"/>
+            <a:ext cx="478085" cy="153352"/>
           </a:xfrm>
           <a:prstGeom prst="rect">
             <a:avLst/>
@@ -3645,8 +3654,8 @@
         </p:nvSpPr>
         <p:spPr>
           <a:xfrm>
-            <a:off x="5606226" y="419108"/>
-            <a:ext cx="997369" cy="330024"/>
+            <a:off x="5957625" y="419108"/>
+            <a:ext cx="1086568" cy="330024"/>
           </a:xfrm>
           <a:prstGeom prst="ellipse">
             <a:avLst/>
@@ -3657,6 +3666,7 @@
               <a:srgbClr val="000000"/>
             </a:solidFill>
           </a:ln>
+          <a:effectLst/>
         </p:spPr>
         <p:style>
           <a:lnRef idx="1">
@@ -3673,7 +3683,7 @@
           </a:fontRef>
         </p:style>
         <p:txBody>
-          <a:bodyPr rtlCol="0" anchor="ctr" wrap="none" lIns="0" rIns="0" tIns="0" bIns="0"/>
+          <a:bodyPr rtlCol="0" anchor="ctr" wrap="none" tIns="0" bIns="0"/>
           <a:lstStyle/>
           <a:p>
             <a:pPr algn="ctr"/>
@@ -3698,8 +3708,8 @@
         </p:nvCxnSpPr>
         <p:spPr>
           <a:xfrm>
-            <a:off x="6603596" y="584120"/>
-            <a:ext cx="541933" cy="0"/>
+            <a:off x="7044193" y="584120"/>
+            <a:ext cx="613291" cy="0"/>
           </a:xfrm>
           <a:prstGeom prst="line">
             <a:avLst/>
@@ -3711,6 +3721,7 @@
             <a:headEnd type="none"/>
             <a:tailEnd type="triangle"/>
           </a:ln>
+          <a:effectLst/>
         </p:spPr>
         <p:style>
           <a:lnRef idx="2">
@@ -3735,8 +3746,8 @@
         </p:nvSpPr>
         <p:spPr>
           <a:xfrm>
-            <a:off x="6501182" y="400764"/>
-            <a:ext cx="746759" cy="153352"/>
+            <a:off x="7135633" y="400764"/>
+            <a:ext cx="430410" cy="153352"/>
           </a:xfrm>
           <a:prstGeom prst="rect">
             <a:avLst/>
@@ -3771,8 +3782,8 @@
         </p:nvSpPr>
         <p:spPr>
           <a:xfrm>
-            <a:off x="6737402" y="614124"/>
-            <a:ext cx="274320" cy="153352"/>
+            <a:off x="7135633" y="614124"/>
+            <a:ext cx="430410" cy="153352"/>
           </a:xfrm>
           <a:prstGeom prst="rect">
             <a:avLst/>
@@ -3807,8 +3818,8 @@
         </p:nvSpPr>
         <p:spPr>
           <a:xfrm>
-            <a:off x="7145529" y="419108"/>
-            <a:ext cx="955836" cy="330024"/>
+            <a:off x="7657484" y="419108"/>
+            <a:ext cx="1040860" cy="330024"/>
           </a:xfrm>
           <a:prstGeom prst="ellipse">
             <a:avLst/>
@@ -3819,6 +3830,7 @@
               <a:srgbClr val="000000"/>
             </a:solidFill>
           </a:ln>
+          <a:effectLst/>
         </p:spPr>
         <p:style>
           <a:lnRef idx="1">
@@ -3835,7 +3847,7 @@
           </a:fontRef>
         </p:style>
         <p:txBody>
-          <a:bodyPr rtlCol="0" anchor="ctr" wrap="none" lIns="0" rIns="0" tIns="0" bIns="0"/>
+          <a:bodyPr rtlCol="0" anchor="ctr" wrap="none" tIns="0" bIns="0"/>
           <a:lstStyle/>
           <a:p>
             <a:pPr algn="ctr"/>
@@ -3860,8 +3872,8 @@
         </p:nvSpPr>
         <p:spPr>
           <a:xfrm>
-            <a:off x="1561078" y="1269920"/>
-            <a:ext cx="3449835" cy="457200"/>
+            <a:off x="1711255" y="1269920"/>
+            <a:ext cx="3585403" cy="457200"/>
           </a:xfrm>
           <a:prstGeom prst="rect">
             <a:avLst/>
@@ -3872,6 +3884,7 @@
               <a:srgbClr val="000000"/>
             </a:solidFill>
           </a:ln>
+          <a:effectLst/>
         </p:spPr>
         <p:style>
           <a:lnRef idx="1">
@@ -3888,7 +3901,7 @@
           </a:fontRef>
         </p:style>
         <p:txBody>
-          <a:bodyPr rtlCol="0" anchor="ctr" wrap="square" lIns="0" rIns="0" tIns="0" bIns="0"/>
+          <a:bodyPr rtlCol="0" anchor="ctr" wrap="square" tIns="0" bIns="0"/>
           <a:lstStyle/>
           <a:p>
             <a:pPr algn="ctr"/>
@@ -3913,7 +3926,7 @@
         </p:nvCxnSpPr>
         <p:spPr>
           <a:xfrm flipV="1">
-            <a:off x="1983650" y="700801"/>
+            <a:off x="2156423" y="700801"/>
             <a:ext cx="0" cy="569119"/>
           </a:xfrm>
           <a:prstGeom prst="line">
@@ -3926,6 +3939,7 @@
             <a:headEnd type="triangle"/>
             <a:tailEnd type="triangle"/>
           </a:ln>
+          <a:effectLst/>
         </p:spPr>
         <p:style>
           <a:lnRef idx="2">
@@ -3950,7 +3964,7 @@
         </p:nvCxnSpPr>
         <p:spPr>
           <a:xfrm flipV="1">
-            <a:off x="3285996" y="700801"/>
+            <a:off x="3503957" y="700801"/>
             <a:ext cx="0" cy="569119"/>
           </a:xfrm>
           <a:prstGeom prst="line">
@@ -3963,6 +3977,7 @@
             <a:headEnd type="triangle"/>
             <a:tailEnd type="triangle"/>
           </a:ln>
+          <a:effectLst/>
         </p:spPr>
         <p:style>
           <a:lnRef idx="2">
@@ -3987,7 +4002,7 @@
         </p:nvCxnSpPr>
         <p:spPr>
           <a:xfrm flipV="1">
-            <a:off x="4588341" y="700801"/>
+            <a:off x="4851492" y="700801"/>
             <a:ext cx="0" cy="569119"/>
           </a:xfrm>
           <a:prstGeom prst="line">
@@ -4000,6 +4015,7 @@
             <a:headEnd type="triangle"/>
             <a:tailEnd type="triangle"/>
           </a:ln>
+          <a:effectLst/>
         </p:spPr>
         <p:style>
           <a:lnRef idx="2">
@@ -4024,8 +4040,8 @@
         </p:nvSpPr>
         <p:spPr>
           <a:xfrm>
-            <a:off x="2968992" y="175926"/>
-            <a:ext cx="634007" cy="233362"/>
+            <a:off x="3152291" y="175926"/>
+            <a:ext cx="703331" cy="233362"/>
           </a:xfrm>
           <a:prstGeom prst="rect">
             <a:avLst/>
@@ -4034,6 +4050,7 @@
           <a:ln>
             <a:noFill/>
           </a:ln>
+          <a:effectLst/>
         </p:spPr>
         <p:style>
           <a:lnRef idx="1">
@@ -4050,7 +4067,7 @@
           </a:fontRef>
         </p:style>
         <p:txBody>
-          <a:bodyPr rtlCol="0" anchor="ctr" wrap="none" lIns="0" rIns="0" tIns="0" bIns="0"/>
+          <a:bodyPr rtlCol="0" anchor="ctr" wrap="none" tIns="0" bIns="0"/>
           <a:lstStyle/>
           <a:p>
             <a:pPr algn="ctr"/>
